--- a/outdoor_seld_e2e/md/seminar/図_付録_実録の流れ_2026-08-13.pptx
+++ b/outdoor_seld_e2e/md/seminar/図_付録_実録の流れ_2026-08-13.pptx
@@ -4870,7 +4870,7 @@
                 <a:latin typeface="Meiryo"/>
                 <a:ea typeface="メイリオ"/>
               </a:rPr>
-              <a:t>ブロック塀のあるT字路・十字路の歩道が定位置。公道の歩道からの収録なので許可は不要（通行の邪魔にならない位置で）。協力者がいれば10m後ろ、いなくても成立</a:t>
+              <a:t>ブロック塀のあるT字路・十字路の歩道が定位置。携行機材のみの受動観測は原則許可不要の見込み（三脚・コーン等を使う日は所轄へ事前確認）。協力者がいれば10m後ろ、方位校正も頼める</a:t>
             </a:r>
           </a:p>
         </p:txBody>
@@ -5446,7 +5446,7 @@
                 <a:latin typeface="Meiryo"/>
                 <a:ea typeface="メイリオ"/>
               </a:rPr>
-              <a:t>② 騒音計を読む</a:t>
+              <a:t>② 騒音計 無言60秒</a:t>
             </a:r>
           </a:p>
         </p:txBody>
@@ -5486,7 +5486,7 @@
                 <a:latin typeface="Meiryo"/>
                 <a:ea typeface="メイリオ"/>
               </a:rPr>
-              <a:t>音量のものさし・小声で1分</a:t>
+              <a:t>読み値は計測後にひとこと</a:t>
             </a:r>
           </a:p>
         </p:txBody>
@@ -6278,7 +6278,7 @@
                 <a:latin typeface="Meiryo"/>
                 <a:ea typeface="メイリオ"/>
               </a:rPr>
-              <a:t>声を出すのはこの90秒だけ。マイクは胸元にあるのでささやき声で足りる。1人のときはベルを置いて自分が90°ずつ回っても同じ効果</a:t>
+              <a:t>騒音計の計測中は無言（声が入ると較正が汚れる）。読み値は計測後にひとこと。チェスト装着の方位校正は協力者が必要——ソロの日は三脚固定で校正し、チェストのテイクは協力者のいる日に寄せる</a:t>
             </a:r>
           </a:p>
         </p:txBody>
@@ -8007,7 +8007,7 @@
                 </a:solidFill>
                 <a:latin typeface="Consolas"/>
               </a:rPr>
-              <a:t>trial=3, class=車,</a:t>
+              <a:t>trial=3, event_id=1,</a:t>
             </a:r>
           </a:p>
           <a:p>
@@ -8023,7 +8023,7 @@
                 </a:solidFill>
                 <a:latin typeface="Consolas"/>
               </a:rPr>
-              <a:t>象限=右, 徐行,</a:t>
+              <a:t>class=車, 象限=右, 徐行,</a:t>
             </a:r>
           </a:p>
           <a:p>
@@ -8079,7 +8079,7 @@
                 <a:latin typeface="Meiryo"/>
                 <a:ea typeface="メイリオ"/>
               </a:rPr>
-              <a:t>しゃべってよいのは試行と試行の間だけ（試行中は無言）。この一言が正解ラベルになる——フレーム単位のx,y,z・距離の手入力はしない設計</a:t>
+              <a:t>しゃべってよいのは試行と試行の間だけ（試行中は無言）。この一言が正解ラベルの1行になる（複数イベントは行を追加）——フレーム単位のx,y,z・距離の手入力はしない設計</a:t>
             </a:r>
           </a:p>
         </p:txBody>
